--- a/topic08-arrays-of-objects/unit-1/talk-2-gym-app/b-gym-v1.pptx
+++ b/topic08-arrays-of-objects/unit-1/talk-2-gym-app/b-gym-v1.pptx
@@ -7252,7 +7252,7 @@
         </p:nvSpPr>
         <p:spPr>
           <a:xfrm>
-            <a:off x="111740" y="4574151"/>
+            <a:off x="539034" y="4953000"/>
             <a:ext cx="3428999" cy="707886"/>
           </a:xfrm>
           <a:prstGeom prst="rect">
@@ -7318,8 +7318,8 @@
         </p:nvSpPr>
         <p:spPr>
           <a:xfrm>
-            <a:off x="4038600" y="4015735"/>
-            <a:ext cx="348556" cy="1851665"/>
+            <a:off x="4344800" y="4114800"/>
+            <a:ext cx="348556" cy="2209800"/>
           </a:xfrm>
           <a:prstGeom prst="leftBrace">
             <a:avLst/>
@@ -7355,10 +7355,10 @@
       </p:sp>
       <p:pic>
         <p:nvPicPr>
-          <p:cNvPr id="3" name="Picture 2">
+          <p:cNvPr id="4" name="Picture 3">
             <a:extLst>
               <a:ext uri="{FF2B5EF4-FFF2-40B4-BE49-F238E27FC236}">
-                <a16:creationId xmlns:a16="http://schemas.microsoft.com/office/drawing/2014/main" id="{32D31DA6-F5DB-0164-A718-C7EFBF4A273C}"/>
+                <a16:creationId xmlns:a16="http://schemas.microsoft.com/office/drawing/2014/main" id="{2FDD5581-7C1A-839F-785D-FF981FA678C5}"/>
               </a:ext>
             </a:extLst>
           </p:cNvPr>
@@ -7375,8 +7375,8 @@
         </p:blipFill>
         <p:spPr>
           <a:xfrm>
-            <a:off x="4436533" y="1838717"/>
-            <a:ext cx="7772400" cy="4065372"/>
+            <a:off x="4724400" y="1167830"/>
+            <a:ext cx="4758017" cy="5415532"/>
           </a:xfrm>
           <a:prstGeom prst="rect">
             <a:avLst/>
@@ -7496,10 +7496,10 @@
       </p:grpSpPr>
       <p:pic>
         <p:nvPicPr>
-          <p:cNvPr id="3" name="Picture 2">
+          <p:cNvPr id="4" name="Picture 3">
             <a:extLst>
               <a:ext uri="{FF2B5EF4-FFF2-40B4-BE49-F238E27FC236}">
-                <a16:creationId xmlns:a16="http://schemas.microsoft.com/office/drawing/2014/main" id="{ABBD58A9-989B-7056-0703-665D0D77617D}"/>
+                <a16:creationId xmlns:a16="http://schemas.microsoft.com/office/drawing/2014/main" id="{ACE7E92E-6F92-DAD7-CB4D-03329483B7F2}"/>
               </a:ext>
             </a:extLst>
           </p:cNvPr>
@@ -7516,8 +7516,8 @@
         </p:blipFill>
         <p:spPr>
           <a:xfrm>
-            <a:off x="4419600" y="1908631"/>
-            <a:ext cx="7772400" cy="4065372"/>
+            <a:off x="4191000" y="1417638"/>
+            <a:ext cx="4269522" cy="4859531"/>
           </a:xfrm>
           <a:prstGeom prst="rect">
             <a:avLst/>
@@ -8018,10 +8018,10 @@
       </p:grpSpPr>
       <p:pic>
         <p:nvPicPr>
-          <p:cNvPr id="3" name="Picture 2">
+          <p:cNvPr id="4" name="Picture 3">
             <a:extLst>
               <a:ext uri="{FF2B5EF4-FFF2-40B4-BE49-F238E27FC236}">
-                <a16:creationId xmlns:a16="http://schemas.microsoft.com/office/drawing/2014/main" id="{41997264-1061-AC91-0F12-CF1FFB360ABB}"/>
+                <a16:creationId xmlns:a16="http://schemas.microsoft.com/office/drawing/2014/main" id="{2D70ED87-716C-7B86-8B35-A83997FF28E4}"/>
               </a:ext>
             </a:extLst>
           </p:cNvPr>
@@ -8038,8 +8038,8 @@
         </p:blipFill>
         <p:spPr>
           <a:xfrm>
-            <a:off x="4388903" y="1831216"/>
-            <a:ext cx="7772400" cy="4065372"/>
+            <a:off x="4191000" y="1073641"/>
+            <a:ext cx="4749800" cy="5406179"/>
           </a:xfrm>
           <a:prstGeom prst="rect">
             <a:avLst/>
@@ -8222,7 +8222,7 @@
         </p:nvSpPr>
         <p:spPr>
           <a:xfrm>
-            <a:off x="4445000" y="4930558"/>
+            <a:off x="4411692" y="5271630"/>
             <a:ext cx="3548743" cy="233066"/>
           </a:xfrm>
           <a:prstGeom prst="roundRect">
@@ -8269,7 +8269,7 @@
         </p:nvSpPr>
         <p:spPr>
           <a:xfrm>
-            <a:off x="4470400" y="4648956"/>
+            <a:off x="4444349" y="4870567"/>
             <a:ext cx="3548743" cy="233066"/>
           </a:xfrm>
           <a:prstGeom prst="roundRect">
@@ -8316,7 +8316,7 @@
         </p:nvSpPr>
         <p:spPr>
           <a:xfrm>
-            <a:off x="4444999" y="4313018"/>
+            <a:off x="4411692" y="4473447"/>
             <a:ext cx="3548743" cy="233066"/>
           </a:xfrm>
           <a:prstGeom prst="roundRect">
@@ -8410,7 +8410,7 @@
         </p:nvSpPr>
         <p:spPr>
           <a:xfrm>
-            <a:off x="4419600" y="5262115"/>
+            <a:off x="4394437" y="5704515"/>
             <a:ext cx="3548743" cy="233066"/>
           </a:xfrm>
           <a:prstGeom prst="roundRect">
@@ -8462,7 +8462,7 @@
         <p:spPr>
           <a:xfrm>
             <a:off x="1869743" y="3236116"/>
-            <a:ext cx="2575256" cy="1193435"/>
+            <a:ext cx="2541949" cy="1353864"/>
           </a:xfrm>
           <a:prstGeom prst="straightConnector1">
             <a:avLst/>
@@ -8505,7 +8505,7 @@
         <p:spPr>
           <a:xfrm>
             <a:off x="1869743" y="3236116"/>
-            <a:ext cx="2600657" cy="1529373"/>
+            <a:ext cx="2574606" cy="1750984"/>
           </a:xfrm>
           <a:prstGeom prst="straightConnector1">
             <a:avLst/>
@@ -8548,7 +8548,7 @@
         <p:spPr>
           <a:xfrm>
             <a:off x="1869743" y="3236116"/>
-            <a:ext cx="2575257" cy="1810975"/>
+            <a:ext cx="2541949" cy="2152047"/>
           </a:xfrm>
           <a:prstGeom prst="straightConnector1">
             <a:avLst/>
@@ -8591,7 +8591,7 @@
         <p:spPr>
           <a:xfrm>
             <a:off x="1869743" y="3236116"/>
-            <a:ext cx="2549857" cy="2142532"/>
+            <a:ext cx="2524694" cy="2584932"/>
           </a:xfrm>
           <a:prstGeom prst="straightConnector1">
             <a:avLst/>
@@ -8687,8 +8687,8 @@
         </p:nvCxnSpPr>
         <p:spPr>
           <a:xfrm flipV="1">
-            <a:off x="2671560" y="5564021"/>
-            <a:ext cx="2124480" cy="830996"/>
+            <a:off x="2171569" y="5879657"/>
+            <a:ext cx="2181414" cy="326930"/>
           </a:xfrm>
           <a:prstGeom prst="straightConnector1">
             <a:avLst/>
@@ -12011,10 +12011,10 @@
       </p:grpSpPr>
       <p:pic>
         <p:nvPicPr>
-          <p:cNvPr id="3" name="Picture 2">
+          <p:cNvPr id="4" name="Picture 3">
             <a:extLst>
               <a:ext uri="{FF2B5EF4-FFF2-40B4-BE49-F238E27FC236}">
-                <a16:creationId xmlns:a16="http://schemas.microsoft.com/office/drawing/2014/main" id="{1010708E-B671-6594-07FA-59C17B59947E}"/>
+                <a16:creationId xmlns:a16="http://schemas.microsoft.com/office/drawing/2014/main" id="{79AA89AD-6A8E-7B95-ACF9-3A1DE3BD4AD9}"/>
               </a:ext>
             </a:extLst>
           </p:cNvPr>
@@ -12031,8 +12031,8 @@
         </p:blipFill>
         <p:spPr>
           <a:xfrm>
-            <a:off x="4114800" y="934648"/>
-            <a:ext cx="10822428" cy="5660696"/>
+            <a:off x="4302033" y="846139"/>
+            <a:ext cx="5070567" cy="5771274"/>
           </a:xfrm>
           <a:prstGeom prst="rect">
             <a:avLst/>
@@ -12049,7 +12049,12 @@
             <p:ph type="title"/>
           </p:nvPr>
         </p:nvSpPr>
-        <p:spPr/>
+        <p:spPr>
+          <a:xfrm>
+            <a:off x="609599" y="93942"/>
+            <a:ext cx="10972800" cy="1143000"/>
+          </a:xfrm>
+        </p:spPr>
         <p:txBody>
           <a:bodyPr>
             <a:normAutofit/>
@@ -12215,7 +12220,7 @@
         </p:nvSpPr>
         <p:spPr>
           <a:xfrm>
-            <a:off x="4395498" y="5501837"/>
+            <a:off x="4393473" y="5592275"/>
             <a:ext cx="3548743" cy="233066"/>
           </a:xfrm>
           <a:prstGeom prst="roundRect">
@@ -19024,10 +19029,10 @@
       </p:grpSpPr>
       <p:pic>
         <p:nvPicPr>
-          <p:cNvPr id="4" name="Picture 3">
+          <p:cNvPr id="3" name="Picture 2">
             <a:extLst>
               <a:ext uri="{FF2B5EF4-FFF2-40B4-BE49-F238E27FC236}">
-                <a16:creationId xmlns:a16="http://schemas.microsoft.com/office/drawing/2014/main" id="{4DBF21D4-2D2B-F997-2EC5-2E53A652D037}"/>
+                <a16:creationId xmlns:a16="http://schemas.microsoft.com/office/drawing/2014/main" id="{1BA02A16-318D-2764-C704-513FBD510604}"/>
               </a:ext>
             </a:extLst>
           </p:cNvPr>
@@ -19044,8 +19049,8 @@
         </p:blipFill>
         <p:spPr>
           <a:xfrm>
-            <a:off x="4405029" y="1050485"/>
-            <a:ext cx="10756000" cy="5625951"/>
+            <a:off x="4313327" y="1026017"/>
+            <a:ext cx="4887629" cy="5563055"/>
           </a:xfrm>
           <a:prstGeom prst="rect">
             <a:avLst/>
@@ -22360,36 +22365,6 @@
           <a:chExt cx="0" cy="0"/>
         </a:xfrm>
       </p:grpSpPr>
-      <p:pic>
-        <p:nvPicPr>
-          <p:cNvPr id="3" name="Picture 2">
-            <a:extLst>
-              <a:ext uri="{FF2B5EF4-FFF2-40B4-BE49-F238E27FC236}">
-                <a16:creationId xmlns:a16="http://schemas.microsoft.com/office/drawing/2014/main" id="{AC741D09-0A4A-265E-EF9C-259DD922CD5D}"/>
-              </a:ext>
-            </a:extLst>
-          </p:cNvPr>
-          <p:cNvPicPr>
-            <a:picLocks noChangeAspect="1"/>
-          </p:cNvPicPr>
-          <p:nvPr/>
-        </p:nvPicPr>
-        <p:blipFill>
-          <a:blip r:embed="rId3"/>
-          <a:stretch>
-            <a:fillRect/>
-          </a:stretch>
-        </p:blipFill>
-        <p:spPr>
-          <a:xfrm>
-            <a:off x="6009751" y="1577621"/>
-            <a:ext cx="7772400" cy="5050159"/>
-          </a:xfrm>
-          <a:prstGeom prst="rect">
-            <a:avLst/>
-          </a:prstGeom>
-        </p:spPr>
-      </p:pic>
       <p:graphicFrame>
         <p:nvGraphicFramePr>
           <p:cNvPr id="4" name="Table 3">
@@ -22630,7 +22605,7 @@
         <p:spPr>
           <a:xfrm>
             <a:off x="6009751" y="1610092"/>
-            <a:ext cx="5508173" cy="5017714"/>
+            <a:ext cx="4494961" cy="5017714"/>
           </a:xfrm>
           <a:prstGeom prst="rect">
             <a:avLst/>
@@ -22667,6 +22642,36 @@
           </a:p>
         </p:txBody>
       </p:sp>
+      <p:pic>
+        <p:nvPicPr>
+          <p:cNvPr id="6" name="Picture 5">
+            <a:extLst>
+              <a:ext uri="{FF2B5EF4-FFF2-40B4-BE49-F238E27FC236}">
+                <a16:creationId xmlns:a16="http://schemas.microsoft.com/office/drawing/2014/main" id="{A8E61FA9-337A-6650-A7D4-18C0E4AF5A9A}"/>
+              </a:ext>
+            </a:extLst>
+          </p:cNvPr>
+          <p:cNvPicPr>
+            <a:picLocks noChangeAspect="1"/>
+          </p:cNvPicPr>
+          <p:nvPr/>
+        </p:nvPicPr>
+        <p:blipFill>
+          <a:blip r:embed="rId3"/>
+          <a:stretch>
+            <a:fillRect/>
+          </a:stretch>
+        </p:blipFill>
+        <p:spPr>
+          <a:xfrm>
+            <a:off x="6031522" y="1582783"/>
+            <a:ext cx="4407878" cy="5017007"/>
+          </a:xfrm>
+          <a:prstGeom prst="rect">
+            <a:avLst/>
+          </a:prstGeom>
+        </p:spPr>
+      </p:pic>
     </p:spTree>
     <p:extLst>
       <p:ext uri="{BB962C8B-B14F-4D97-AF65-F5344CB8AC3E}">
@@ -22818,10 +22823,10 @@
       </p:grpSpPr>
       <p:pic>
         <p:nvPicPr>
-          <p:cNvPr id="3" name="Picture 2">
+          <p:cNvPr id="6" name="Picture 5">
             <a:extLst>
               <a:ext uri="{FF2B5EF4-FFF2-40B4-BE49-F238E27FC236}">
-                <a16:creationId xmlns:a16="http://schemas.microsoft.com/office/drawing/2014/main" id="{B5C5DDAC-21DB-3D2D-D053-87A7A7AF428F}"/>
+                <a16:creationId xmlns:a16="http://schemas.microsoft.com/office/drawing/2014/main" id="{B06BA4E7-AF34-8523-2D81-D2F6C3797771}"/>
               </a:ext>
             </a:extLst>
           </p:cNvPr>
@@ -22838,8 +22843,8 @@
         </p:blipFill>
         <p:spPr>
           <a:xfrm>
-            <a:off x="6009751" y="1702342"/>
-            <a:ext cx="10103333" cy="5284572"/>
+            <a:off x="6009751" y="1622278"/>
+            <a:ext cx="4495800" cy="5117079"/>
           </a:xfrm>
           <a:prstGeom prst="rect">
             <a:avLst/>
@@ -23085,8 +23090,8 @@
         </p:nvSpPr>
         <p:spPr>
           <a:xfrm>
-            <a:off x="6023862" y="1778274"/>
-            <a:ext cx="6168138" cy="4805088"/>
+            <a:off x="6023862" y="1622277"/>
+            <a:ext cx="4495800" cy="5117073"/>
           </a:xfrm>
           <a:prstGeom prst="rect">
             <a:avLst/>
@@ -23738,10 +23743,10 @@
       </p:grpSpPr>
       <p:pic>
         <p:nvPicPr>
-          <p:cNvPr id="3" name="Picture 2">
+          <p:cNvPr id="6" name="Picture 5">
             <a:extLst>
               <a:ext uri="{FF2B5EF4-FFF2-40B4-BE49-F238E27FC236}">
-                <a16:creationId xmlns:a16="http://schemas.microsoft.com/office/drawing/2014/main" id="{5AAFFB40-80B7-92A5-4AA2-144393956B95}"/>
+                <a16:creationId xmlns:a16="http://schemas.microsoft.com/office/drawing/2014/main" id="{5F259F8A-5060-28F7-1C4B-C8E968E7CF1C}"/>
               </a:ext>
             </a:extLst>
           </p:cNvPr>
@@ -23758,8 +23763,8 @@
         </p:blipFill>
         <p:spPr>
           <a:xfrm>
-            <a:off x="6033738" y="1752600"/>
-            <a:ext cx="8077200" cy="5335634"/>
+            <a:off x="5985764" y="1745723"/>
+            <a:ext cx="4518948" cy="5143426"/>
           </a:xfrm>
           <a:prstGeom prst="rect">
             <a:avLst/>
@@ -24000,7 +24005,7 @@
         <p:spPr>
           <a:xfrm>
             <a:off x="6019627" y="1858161"/>
-            <a:ext cx="6172373" cy="5076033"/>
+            <a:ext cx="4518949" cy="5076033"/>
           </a:xfrm>
           <a:prstGeom prst="rect">
             <a:avLst/>
@@ -24526,8 +24531,8 @@
         </p:nvSpPr>
         <p:spPr>
           <a:xfrm>
-            <a:off x="5985764" y="4367019"/>
-            <a:ext cx="4138630" cy="2430774"/>
+            <a:off x="5985764" y="4211187"/>
+            <a:ext cx="4138630" cy="2586606"/>
           </a:xfrm>
           <a:prstGeom prst="rect">
             <a:avLst/>
@@ -32622,10 +32627,10 @@
       </p:grpSpPr>
       <p:pic>
         <p:nvPicPr>
-          <p:cNvPr id="3" name="Picture 2">
+          <p:cNvPr id="4" name="Picture 3">
             <a:extLst>
               <a:ext uri="{FF2B5EF4-FFF2-40B4-BE49-F238E27FC236}">
-                <a16:creationId xmlns:a16="http://schemas.microsoft.com/office/drawing/2014/main" id="{20293EAE-7DA0-5094-0A08-2A0B4F7AB046}"/>
+                <a16:creationId xmlns:a16="http://schemas.microsoft.com/office/drawing/2014/main" id="{33E90E9B-3BBE-185D-C0B5-91ADA2C30330}"/>
               </a:ext>
             </a:extLst>
           </p:cNvPr>
@@ -32642,8 +32647,8 @@
         </p:blipFill>
         <p:spPr>
           <a:xfrm>
-            <a:off x="4533901" y="1718411"/>
-            <a:ext cx="7772400" cy="4065372"/>
+            <a:off x="6096000" y="1509853"/>
+            <a:ext cx="4277432" cy="4868534"/>
           </a:xfrm>
           <a:prstGeom prst="rect">
             <a:avLst/>
@@ -32872,13 +32877,14 @@
           </p:cNvPr>
           <p:cNvCxnSpPr>
             <a:cxnSpLocks/>
+            <a:stCxn id="10" idx="3"/>
           </p:cNvCxnSpPr>
           <p:nvPr/>
         </p:nvCxnSpPr>
         <p:spPr>
           <a:xfrm flipV="1">
-            <a:off x="3987800" y="1969061"/>
-            <a:ext cx="3708400" cy="686115"/>
+            <a:off x="4102101" y="1833978"/>
+            <a:ext cx="3213099" cy="1075130"/>
           </a:xfrm>
           <a:prstGeom prst="straightConnector1">
             <a:avLst/>
@@ -32981,8 +32987,8 @@
         </p:nvCxnSpPr>
         <p:spPr>
           <a:xfrm flipV="1">
-            <a:off x="1987550" y="5152882"/>
-            <a:ext cx="2705100" cy="984898"/>
+            <a:off x="1987550" y="4825494"/>
+            <a:ext cx="4184650" cy="1312286"/>
           </a:xfrm>
           <a:prstGeom prst="straightConnector1">
             <a:avLst/>
@@ -33064,7 +33070,7 @@
         </p:nvSpPr>
         <p:spPr>
           <a:xfrm>
-            <a:off x="7327899" y="1816661"/>
+            <a:off x="7315200" y="1641162"/>
             <a:ext cx="1981202" cy="304800"/>
           </a:xfrm>
           <a:prstGeom prst="roundRect">
@@ -33169,8 +33175,8 @@
         </p:nvCxnSpPr>
         <p:spPr>
           <a:xfrm flipV="1">
-            <a:off x="2654301" y="3038389"/>
-            <a:ext cx="1777999" cy="765420"/>
+            <a:off x="2654301" y="2786872"/>
+            <a:ext cx="3517899" cy="1016937"/>
           </a:xfrm>
           <a:prstGeom prst="straightConnector1">
             <a:avLst/>
@@ -33214,7 +33220,7 @@
         </p:nvSpPr>
         <p:spPr>
           <a:xfrm>
-            <a:off x="6449730" y="6099680"/>
+            <a:off x="7491130" y="6137124"/>
             <a:ext cx="4700870" cy="461665"/>
           </a:xfrm>
           <a:prstGeom prst="rect">
@@ -33276,8 +33282,8 @@
         </p:nvCxnSpPr>
         <p:spPr>
           <a:xfrm flipH="1" flipV="1">
-            <a:off x="4706057" y="2897809"/>
-            <a:ext cx="3910295" cy="3239971"/>
+            <a:off x="6357056" y="2636883"/>
+            <a:ext cx="3701344" cy="3500241"/>
           </a:xfrm>
           <a:prstGeom prst="straightConnector1">
             <a:avLst/>
@@ -33733,10 +33739,10 @@
       </p:grpSpPr>
       <p:pic>
         <p:nvPicPr>
-          <p:cNvPr id="4" name="Picture 3">
+          <p:cNvPr id="3" name="Picture 2">
             <a:extLst>
               <a:ext uri="{FF2B5EF4-FFF2-40B4-BE49-F238E27FC236}">
-                <a16:creationId xmlns:a16="http://schemas.microsoft.com/office/drawing/2014/main" id="{24A0AEED-53CC-3FF0-AE80-4ACD9C0AC163}"/>
+                <a16:creationId xmlns:a16="http://schemas.microsoft.com/office/drawing/2014/main" id="{FB58BBDC-B0B6-A592-B6A3-E6F2F687F5F9}"/>
               </a:ext>
             </a:extLst>
           </p:cNvPr>
@@ -33753,8 +33759,8 @@
         </p:blipFill>
         <p:spPr>
           <a:xfrm>
-            <a:off x="4271073" y="1741634"/>
-            <a:ext cx="8241368" cy="4310667"/>
+            <a:off x="5749432" y="1340307"/>
+            <a:ext cx="5054600" cy="5753100"/>
           </a:xfrm>
           <a:prstGeom prst="rect">
             <a:avLst/>
@@ -33906,8 +33912,8 @@
         </p:nvSpPr>
         <p:spPr>
           <a:xfrm>
-            <a:off x="4191000" y="3313715"/>
-            <a:ext cx="7772399" cy="486454"/>
+            <a:off x="5486401" y="3441949"/>
+            <a:ext cx="5562600" cy="608453"/>
           </a:xfrm>
           <a:prstGeom prst="roundRect">
             <a:avLst/>
@@ -34089,8 +34095,8 @@
         </p:nvCxnSpPr>
         <p:spPr>
           <a:xfrm flipV="1">
-            <a:off x="2051453" y="3657600"/>
-            <a:ext cx="3053947" cy="2497514"/>
+            <a:off x="2051453" y="3823898"/>
+            <a:ext cx="4209976" cy="2331216"/>
           </a:xfrm>
           <a:prstGeom prst="straightConnector1">
             <a:avLst/>
@@ -34133,8 +34139,8 @@
         </p:nvCxnSpPr>
         <p:spPr>
           <a:xfrm flipV="1">
-            <a:off x="2082858" y="3647882"/>
-            <a:ext cx="2336742" cy="603859"/>
+            <a:off x="2082858" y="3807175"/>
+            <a:ext cx="3818691" cy="444566"/>
           </a:xfrm>
           <a:prstGeom prst="straightConnector1">
             <a:avLst/>
@@ -34250,14 +34256,13 @@
           </p:cNvPr>
           <p:cNvCxnSpPr>
             <a:cxnSpLocks/>
-            <a:stCxn id="8" idx="0"/>
           </p:cNvCxnSpPr>
           <p:nvPr/>
         </p:nvCxnSpPr>
         <p:spPr>
           <a:xfrm flipH="1" flipV="1">
-            <a:off x="5592701" y="3673529"/>
-            <a:ext cx="3512114" cy="2566129"/>
+            <a:off x="7503206" y="3889289"/>
+            <a:ext cx="1601609" cy="2293548"/>
           </a:xfrm>
           <a:prstGeom prst="straightConnector1">
             <a:avLst/>
@@ -34300,8 +34305,8 @@
         </p:nvCxnSpPr>
         <p:spPr>
           <a:xfrm flipV="1">
-            <a:off x="9104815" y="3673529"/>
-            <a:ext cx="1785082" cy="2481585"/>
+            <a:off x="9104815" y="3886200"/>
+            <a:ext cx="1093343" cy="2268914"/>
           </a:xfrm>
           <a:prstGeom prst="straightConnector1">
             <a:avLst/>
@@ -34345,8 +34350,8 @@
         </p:nvCxnSpPr>
         <p:spPr>
           <a:xfrm flipH="1" flipV="1">
-            <a:off x="6421962" y="3724471"/>
-            <a:ext cx="2682853" cy="2515187"/>
+            <a:off x="8238243" y="3858477"/>
+            <a:ext cx="866572" cy="2381181"/>
           </a:xfrm>
           <a:prstGeom prst="straightConnector1">
             <a:avLst/>
@@ -34390,8 +34395,8 @@
         </p:nvCxnSpPr>
         <p:spPr>
           <a:xfrm flipH="1" flipV="1">
-            <a:off x="7678700" y="3724471"/>
-            <a:ext cx="1426115" cy="2515187"/>
+            <a:off x="8928201" y="3886200"/>
+            <a:ext cx="176614" cy="2353458"/>
           </a:xfrm>
           <a:prstGeom prst="straightConnector1">
             <a:avLst/>
@@ -34429,14 +34434,13 @@
           </p:cNvPr>
           <p:cNvCxnSpPr>
             <a:cxnSpLocks/>
-            <a:stCxn id="8" idx="0"/>
           </p:cNvCxnSpPr>
           <p:nvPr/>
         </p:nvCxnSpPr>
         <p:spPr>
-          <a:xfrm flipH="1" flipV="1">
-            <a:off x="8888031" y="3724471"/>
-            <a:ext cx="216784" cy="2515187"/>
+          <a:xfrm flipV="1">
+            <a:off x="9104815" y="3823898"/>
+            <a:ext cx="474855" cy="2372814"/>
           </a:xfrm>
           <a:prstGeom prst="straightConnector1">
             <a:avLst/>

--- a/topic08-arrays-of-objects/unit-1/talk-2-gym-app/b-gym-v1.pptx
+++ b/topic08-arrays-of-objects/unit-1/talk-2-gym-app/b-gym-v1.pptx
@@ -249,7 +249,7 @@
           <a:p>
             <a:fld id="{56BC3C30-7F3D-4B20-9974-47C57B22CA6E}" type="datetimeFigureOut">
               <a:rPr lang="en-IE" smtClean="0"/>
-              <a:t>12/11/2025</a:t>
+              <a:t>14/11/2025</a:t>
             </a:fld>
             <a:endParaRPr lang="en-IE"/>
           </a:p>
@@ -1389,7 +1389,7 @@
             <a:fld id="{1D8BD707-D9CF-40AE-B4C6-C98DA3205C09}" type="datetimeFigureOut">
               <a:rPr lang="en-US" smtClean="0"/>
               <a:pPr/>
-              <a:t>11/12/25</a:t>
+              <a:t>11/14/25</a:t>
             </a:fld>
             <a:endParaRPr lang="en-US"/>
           </a:p>
@@ -1561,7 +1561,7 @@
             <a:fld id="{1D8BD707-D9CF-40AE-B4C6-C98DA3205C09}" type="datetimeFigureOut">
               <a:rPr lang="en-US" smtClean="0"/>
               <a:pPr/>
-              <a:t>11/12/25</a:t>
+              <a:t>11/14/25</a:t>
             </a:fld>
             <a:endParaRPr lang="en-US"/>
           </a:p>
@@ -1743,7 +1743,7 @@
             <a:fld id="{1D8BD707-D9CF-40AE-B4C6-C98DA3205C09}" type="datetimeFigureOut">
               <a:rPr lang="en-US" smtClean="0"/>
               <a:pPr/>
-              <a:t>11/12/25</a:t>
+              <a:t>11/14/25</a:t>
             </a:fld>
             <a:endParaRPr lang="en-US"/>
           </a:p>
@@ -2382,7 +2382,7 @@
             <a:fld id="{1D8BD707-D9CF-40AE-B4C6-C98DA3205C09}" type="datetimeFigureOut">
               <a:rPr lang="en-US" smtClean="0"/>
               <a:pPr/>
-              <a:t>11/12/25</a:t>
+              <a:t>11/14/25</a:t>
             </a:fld>
             <a:endParaRPr lang="en-US"/>
           </a:p>
@@ -2932,7 +2932,7 @@
             <a:fld id="{1D8BD707-D9CF-40AE-B4C6-C98DA3205C09}" type="datetimeFigureOut">
               <a:rPr lang="en-US" smtClean="0"/>
               <a:pPr/>
-              <a:t>11/12/25</a:t>
+              <a:t>11/14/25</a:t>
             </a:fld>
             <a:endParaRPr lang="en-US"/>
           </a:p>
@@ -3233,7 +3233,7 @@
             <a:fld id="{1D8BD707-D9CF-40AE-B4C6-C98DA3205C09}" type="datetimeFigureOut">
               <a:rPr lang="en-US" smtClean="0"/>
               <a:pPr/>
-              <a:t>11/12/25</a:t>
+              <a:t>11/14/25</a:t>
             </a:fld>
             <a:endParaRPr lang="en-US"/>
           </a:p>
@@ -3945,7 +3945,7 @@
             <a:fld id="{1D8BD707-D9CF-40AE-B4C6-C98DA3205C09}" type="datetimeFigureOut">
               <a:rPr lang="en-US" smtClean="0"/>
               <a:pPr/>
-              <a:t>11/12/25</a:t>
+              <a:t>11/14/25</a:t>
             </a:fld>
             <a:endParaRPr lang="en-US"/>
           </a:p>
@@ -4316,7 +4316,7 @@
             <a:fld id="{1D8BD707-D9CF-40AE-B4C6-C98DA3205C09}" type="datetimeFigureOut">
               <a:rPr lang="en-US" smtClean="0"/>
               <a:pPr/>
-              <a:t>11/12/25</a:t>
+              <a:t>11/14/25</a:t>
             </a:fld>
             <a:endParaRPr lang="en-US"/>
           </a:p>
@@ -4694,7 +4694,7 @@
             <a:fld id="{1D8BD707-D9CF-40AE-B4C6-C98DA3205C09}" type="datetimeFigureOut">
               <a:rPr lang="en-US" smtClean="0"/>
               <a:pPr/>
-              <a:t>11/12/25</a:t>
+              <a:t>11/14/25</a:t>
             </a:fld>
             <a:endParaRPr lang="en-US"/>
           </a:p>
@@ -4973,7 +4973,7 @@
             <a:fld id="{1D8BD707-D9CF-40AE-B4C6-C98DA3205C09}" type="datetimeFigureOut">
               <a:rPr lang="en-US" smtClean="0"/>
               <a:pPr/>
-              <a:t>11/12/25</a:t>
+              <a:t>11/14/25</a:t>
             </a:fld>
             <a:endParaRPr lang="en-US"/>
           </a:p>
@@ -5232,7 +5232,7 @@
             <a:fld id="{1D8BD707-D9CF-40AE-B4C6-C98DA3205C09}" type="datetimeFigureOut">
               <a:rPr lang="en-US" smtClean="0"/>
               <a:pPr/>
-              <a:t>11/12/25</a:t>
+              <a:t>11/14/25</a:t>
             </a:fld>
             <a:endParaRPr lang="en-US"/>
           </a:p>
@@ -5452,7 +5452,7 @@
             <a:fld id="{1D8BD707-D9CF-40AE-B4C6-C98DA3205C09}" type="datetimeFigureOut">
               <a:rPr lang="en-US" smtClean="0"/>
               <a:pPr/>
-              <a:t>11/12/25</a:t>
+              <a:t>11/14/25</a:t>
             </a:fld>
             <a:endParaRPr lang="en-US"/>
           </a:p>
@@ -17571,7 +17571,7 @@
                 <a:latin typeface="Courier New" panose="02070309020205020404" pitchFamily="49" charset="0"/>
                 <a:cs typeface="Courier New" panose="02070309020205020404" pitchFamily="49" charset="0"/>
               </a:rPr>
-              <a:t>() &gt; </a:t>
+              <a:t>() &lt;= </a:t>
             </a:r>
             <a:r>
               <a:rPr lang="en-IE" sz="2400" dirty="0">
@@ -17641,59 +17641,11 @@
               <a:t> </a:t>
             </a:r>
             <a:r>
-              <a:rPr lang="en-IE" sz="2400" dirty="0">
+              <a:rPr lang="en-IE" sz="2400">
                 <a:latin typeface="Courier New" panose="02070309020205020404" pitchFamily="49" charset="0"/>
                 <a:cs typeface="Courier New" panose="02070309020205020404" pitchFamily="49" charset="0"/>
               </a:rPr>
-              <a:t>= </a:t>
-            </a:r>
-            <a:r>
-              <a:rPr lang="en-IE" sz="2400" dirty="0" err="1">
-                <a:latin typeface="Courier New" panose="02070309020205020404" pitchFamily="49" charset="0"/>
-                <a:cs typeface="Courier New" panose="02070309020205020404" pitchFamily="49" charset="0"/>
-              </a:rPr>
-              <a:t>name.substring</a:t>
-            </a:r>
-            <a:r>
-              <a:rPr lang="en-IE" sz="2400" dirty="0">
-                <a:latin typeface="Courier New" panose="02070309020205020404" pitchFamily="49" charset="0"/>
-                <a:cs typeface="Courier New" panose="02070309020205020404" pitchFamily="49" charset="0"/>
-              </a:rPr>
-              <a:t>(</a:t>
-            </a:r>
-            <a:r>
-              <a:rPr lang="en-IE" sz="2400" dirty="0">
-                <a:solidFill>
-                  <a:srgbClr val="0000FF"/>
-                </a:solidFill>
-                <a:latin typeface="Courier New" panose="02070309020205020404" pitchFamily="49" charset="0"/>
-                <a:cs typeface="Courier New" panose="02070309020205020404" pitchFamily="49" charset="0"/>
-              </a:rPr>
-              <a:t>0</a:t>
-            </a:r>
-            <a:r>
-              <a:rPr lang="en-IE" sz="2400" dirty="0">
-                <a:latin typeface="Courier New" panose="02070309020205020404" pitchFamily="49" charset="0"/>
-                <a:cs typeface="Courier New" panose="02070309020205020404" pitchFamily="49" charset="0"/>
-              </a:rPr>
-              <a:t>,</a:t>
-            </a:r>
-            <a:r>
-              <a:rPr lang="en-IE" sz="2400" dirty="0">
-                <a:solidFill>
-                  <a:srgbClr val="0000FF"/>
-                </a:solidFill>
-                <a:latin typeface="Courier New" panose="02070309020205020404" pitchFamily="49" charset="0"/>
-                <a:cs typeface="Courier New" panose="02070309020205020404" pitchFamily="49" charset="0"/>
-              </a:rPr>
-              <a:t>30</a:t>
-            </a:r>
-            <a:r>
-              <a:rPr lang="en-IE" sz="2400" dirty="0">
-                <a:latin typeface="Courier New" panose="02070309020205020404" pitchFamily="49" charset="0"/>
-                <a:cs typeface="Courier New" panose="02070309020205020404" pitchFamily="49" charset="0"/>
-              </a:rPr>
-              <a:t>);</a:t>
+              <a:t>= name;</a:t>
             </a:r>
             <a:br>
               <a:rPr lang="en-IE" sz="2400" dirty="0">
